--- a/src/slides/lesson-4-theory.pptx
+++ b/src/slides/lesson-4-theory.pptx
@@ -11,9 +11,20 @@
     <p:sldId id="259" r:id="rId5"/>
     <p:sldId id="260" r:id="rId6"/>
     <p:sldId id="261" r:id="rId7"/>
+    <p:sldId id="262" r:id="rId8"/>
+    <p:sldId id="263" r:id="rId9"/>
+    <p:sldId id="264" r:id="rId10"/>
+    <p:sldId id="265" r:id="rId11"/>
+    <p:sldId id="266" r:id="rId12"/>
+    <p:sldId id="267" r:id="rId13"/>
+    <p:sldId id="268" r:id="rId14"/>
+    <p:sldId id="269" r:id="rId15"/>
+    <p:sldId id="270" r:id="rId16"/>
+    <p:sldId id="271" r:id="rId17"/>
+    <p:sldId id="272" r:id="rId18"/>
   </p:sldIdLst>
   <p:notesMasterIdLst>
-    <p:notesMasterId r:id="rId8"/>
+    <p:notesMasterId r:id="rId19"/>
   </p:notesMasterIdLst>
   <p:sldSz cx="12192000" cy="6858000"/>
   <p:notesSz cx="6858000" cy="12192000"/>
@@ -507,7 +518,11 @@
           <a:p>
             <a:r>
               <a:rPr lang="en-US" dirty="0"/>
-              <a:t/>
+              <a:t>Speaker Notes:
+• Welcome to lesson 4 - big leap forward today
+• Transforming simple expense tracker into multi-user application
+• Two main areas: backend modernization + frontend state management
+• Moving from prototype to production-ready architecture</a:t>
             </a:r>
             <a:endParaRPr lang="en-US" dirty="0"/>
           </a:p>
@@ -549,6 +564,754 @@
 </p:notes>
 </file>
 
+<file path=ppt/notesSlides/notesSlide10.xml><?xml version="1.0" encoding="utf-8"?>
+<p:notes xmlns:a="http://schemas.openxmlformats.org/drawingml/2006/main" xmlns:r="http://schemas.openxmlformats.org/officeDocument/2006/relationships" xmlns:p="http://schemas.openxmlformats.org/presentationml/2006/main">
+  <p:cSld>
+    <p:spTree>
+      <p:nvGrpSpPr>
+        <p:cNvPr id="1" name=""/>
+        <p:cNvGrpSpPr/>
+        <p:nvPr/>
+      </p:nvGrpSpPr>
+      <p:grpSpPr>
+        <a:xfrm>
+          <a:off x="0" y="0"/>
+          <a:ext cx="0" cy="0"/>
+          <a:chOff x="0" y="0"/>
+          <a:chExt cx="0" cy="0"/>
+        </a:xfrm>
+      </p:grpSpPr>
+      <p:sp>
+        <p:nvSpPr>
+          <p:cNvPr id="2" name="Slide Image Placeholder 1"/>
+          <p:cNvSpPr>
+            <a:spLocks noGrp="1" noRot="1" noChangeAspect="1"/>
+          </p:cNvSpPr>
+          <p:nvPr>
+            <p:ph type="sldImg"/>
+          </p:nvPr>
+        </p:nvSpPr>
+        <p:spPr/>
+      </p:sp>
+      <p:sp>
+        <p:nvSpPr>
+          <p:cNvPr id="3" name="Notes Placeholder 2"/>
+          <p:cNvSpPr>
+            <a:spLocks noGrp="1"/>
+          </p:cNvSpPr>
+          <p:nvPr>
+            <p:ph type="body" idx="1"/>
+          </p:nvPr>
+        </p:nvSpPr>
+        <p:spPr/>
+        <p:txBody>
+          <a:bodyPr/>
+          <a:lstStyle/>
+          <a:p>
+            <a:r>
+              <a:rPr lang="en-US" dirty="0"/>
+              <a:t>Speaker Notes:
+• Loaders move data fetching out of components
+• Data fetched before route renders - eliminates loading states
+• Components become pure presentation logic
+• Better separation of concerns
+• Enables caching and prefetching
+• React Router handles the data flow</a:t>
+            </a:r>
+            <a:endParaRPr lang="en-US" dirty="0"/>
+          </a:p>
+        </p:txBody>
+      </p:sp>
+      <p:sp>
+        <p:nvSpPr>
+          <p:cNvPr id="4" name="Slide Number Placeholder 3"/>
+          <p:cNvSpPr>
+            <a:spLocks noGrp="1"/>
+          </p:cNvSpPr>
+          <p:nvPr>
+            <p:ph type="sldNum" sz="quarter" idx="10"/>
+          </p:nvPr>
+        </p:nvSpPr>
+        <p:spPr/>
+        <p:txBody>
+          <a:bodyPr/>
+          <a:lstStyle/>
+          <a:p>
+            <a:fld id="{F7021451-1387-4CA6-816F-3879F97B5CBC}" type="slidenum">
+              <a:rPr lang="en-US"/>
+              <a:t>10</a:t>
+            </a:fld>
+            <a:endParaRPr lang="en-US"/>
+          </a:p>
+        </p:txBody>
+      </p:sp>
+    </p:spTree>
+    <p:extLst>
+      <p:ext uri="{BB962C8B-B14F-4D97-AF65-F5344CB8AC3E}">
+        <p14:creationId xmlns:p14="http://schemas.microsoft.com/office/powerpoint/2010/main" val="1024086991"/>
+      </p:ext>
+    </p:extLst>
+  </p:cSld>
+  <p:clrMapOvr>
+    <a:masterClrMapping/>
+  </p:clrMapOvr>
+</p:notes>
+</file>
+
+<file path=ppt/notesSlides/notesSlide11.xml><?xml version="1.0" encoding="utf-8"?>
+<p:notes xmlns:a="http://schemas.openxmlformats.org/drawingml/2006/main" xmlns:r="http://schemas.openxmlformats.org/officeDocument/2006/relationships" xmlns:p="http://schemas.openxmlformats.org/presentationml/2006/main">
+  <p:cSld>
+    <p:spTree>
+      <p:nvGrpSpPr>
+        <p:cNvPr id="1" name=""/>
+        <p:cNvGrpSpPr/>
+        <p:nvPr/>
+      </p:nvGrpSpPr>
+      <p:grpSpPr>
+        <a:xfrm>
+          <a:off x="0" y="0"/>
+          <a:ext cx="0" cy="0"/>
+          <a:chOff x="0" y="0"/>
+          <a:chExt cx="0" cy="0"/>
+        </a:xfrm>
+      </p:grpSpPr>
+      <p:sp>
+        <p:nvSpPr>
+          <p:cNvPr id="2" name="Slide Image Placeholder 1"/>
+          <p:cNvSpPr>
+            <a:spLocks noGrp="1" noRot="1" noChangeAspect="1"/>
+          </p:cNvSpPr>
+          <p:nvPr>
+            <p:ph type="sldImg"/>
+          </p:nvPr>
+        </p:nvSpPr>
+        <p:spPr/>
+      </p:sp>
+      <p:sp>
+        <p:nvSpPr>
+          <p:cNvPr id="3" name="Notes Placeholder 2"/>
+          <p:cNvSpPr>
+            <a:spLocks noGrp="1"/>
+          </p:cNvSpPr>
+          <p:nvPr>
+            <p:ph type="body" idx="1"/>
+          </p:nvPr>
+        </p:nvSpPr>
+        <p:spPr/>
+        <p:txBody>
+          <a:bodyPr/>
+          <a:lstStyle/>
+          <a:p>
+            <a:r>
+              <a:rPr lang="en-US" dirty="0"/>
+              <a:t>Speaker Notes:
+• Layout routes share UI and state across multiple pages
+• Outlet renders child routes with shared context
+• Perfect for user selection, navigation, global UI elements
+• Avoids prop drilling for common state
+• Clean way to structure multi-page applications</a:t>
+            </a:r>
+            <a:endParaRPr lang="en-US" dirty="0"/>
+          </a:p>
+        </p:txBody>
+      </p:sp>
+      <p:sp>
+        <p:nvSpPr>
+          <p:cNvPr id="4" name="Slide Number Placeholder 3"/>
+          <p:cNvSpPr>
+            <a:spLocks noGrp="1"/>
+          </p:cNvSpPr>
+          <p:nvPr>
+            <p:ph type="sldNum" sz="quarter" idx="10"/>
+          </p:nvPr>
+        </p:nvSpPr>
+        <p:spPr/>
+        <p:txBody>
+          <a:bodyPr/>
+          <a:lstStyle/>
+          <a:p>
+            <a:fld id="{F7021451-1387-4CA6-816F-3879F97B5CBC}" type="slidenum">
+              <a:rPr lang="en-US"/>
+              <a:t>11</a:t>
+            </a:fld>
+            <a:endParaRPr lang="en-US"/>
+          </a:p>
+        </p:txBody>
+      </p:sp>
+    </p:spTree>
+    <p:extLst>
+      <p:ext uri="{BB962C8B-B14F-4D97-AF65-F5344CB8AC3E}">
+        <p14:creationId xmlns:p14="http://schemas.microsoft.com/office/powerpoint/2010/main" val="1024086991"/>
+      </p:ext>
+    </p:extLst>
+  </p:cSld>
+  <p:clrMapOvr>
+    <a:masterClrMapping/>
+  </p:clrMapOvr>
+</p:notes>
+</file>
+
+<file path=ppt/notesSlides/notesSlide12.xml><?xml version="1.0" encoding="utf-8"?>
+<p:notes xmlns:a="http://schemas.openxmlformats.org/drawingml/2006/main" xmlns:r="http://schemas.openxmlformats.org/officeDocument/2006/relationships" xmlns:p="http://schemas.openxmlformats.org/presentationml/2006/main">
+  <p:cSld>
+    <p:spTree>
+      <p:nvGrpSpPr>
+        <p:cNvPr id="1" name=""/>
+        <p:cNvGrpSpPr/>
+        <p:nvPr/>
+      </p:nvGrpSpPr>
+      <p:grpSpPr>
+        <a:xfrm>
+          <a:off x="0" y="0"/>
+          <a:ext cx="0" cy="0"/>
+          <a:chOff x="0" y="0"/>
+          <a:chExt cx="0" cy="0"/>
+        </a:xfrm>
+      </p:grpSpPr>
+      <p:sp>
+        <p:nvSpPr>
+          <p:cNvPr id="2" name="Slide Image Placeholder 1"/>
+          <p:cNvSpPr>
+            <a:spLocks noGrp="1" noRot="1" noChangeAspect="1"/>
+          </p:cNvSpPr>
+          <p:nvPr>
+            <p:ph type="sldImg"/>
+          </p:nvPr>
+        </p:nvSpPr>
+        <p:spPr/>
+      </p:sp>
+      <p:sp>
+        <p:nvSpPr>
+          <p:cNvPr id="3" name="Notes Placeholder 2"/>
+          <p:cNvSpPr>
+            <a:spLocks noGrp="1"/>
+          </p:cNvSpPr>
+          <p:nvPr>
+            <p:ph type="body" idx="1"/>
+          </p:nvPr>
+        </p:nvSpPr>
+        <p:spPr/>
+        <p:txBody>
+          <a:bodyPr/>
+          <a:lstStyle/>
+          <a:p>
+            <a:r>
+              <a:rPr lang="en-US" dirty="0"/>
+              <a:t>Speaker Notes:
+• Child routes access outlet context with useOutletContext hook
+• Clean way to share state without prop drilling
+• Type-safe access to shared data
+• Can conditionally render based on context
+• Alternative to React Context for route-specific state</a:t>
+            </a:r>
+            <a:endParaRPr lang="en-US" dirty="0"/>
+          </a:p>
+        </p:txBody>
+      </p:sp>
+      <p:sp>
+        <p:nvSpPr>
+          <p:cNvPr id="4" name="Slide Number Placeholder 3"/>
+          <p:cNvSpPr>
+            <a:spLocks noGrp="1"/>
+          </p:cNvSpPr>
+          <p:nvPr>
+            <p:ph type="sldNum" sz="quarter" idx="10"/>
+          </p:nvPr>
+        </p:nvSpPr>
+        <p:spPr/>
+        <p:txBody>
+          <a:bodyPr/>
+          <a:lstStyle/>
+          <a:p>
+            <a:fld id="{F7021451-1387-4CA6-816F-3879F97B5CBC}" type="slidenum">
+              <a:rPr lang="en-US"/>
+              <a:t>12</a:t>
+            </a:fld>
+            <a:endParaRPr lang="en-US"/>
+          </a:p>
+        </p:txBody>
+      </p:sp>
+    </p:spTree>
+    <p:extLst>
+      <p:ext uri="{BB962C8B-B14F-4D97-AF65-F5344CB8AC3E}">
+        <p14:creationId xmlns:p14="http://schemas.microsoft.com/office/powerpoint/2010/main" val="1024086991"/>
+      </p:ext>
+    </p:extLst>
+  </p:cSld>
+  <p:clrMapOvr>
+    <a:masterClrMapping/>
+  </p:clrMapOvr>
+</p:notes>
+</file>
+
+<file path=ppt/notesSlides/notesSlide13.xml><?xml version="1.0" encoding="utf-8"?>
+<p:notes xmlns:a="http://schemas.openxmlformats.org/drawingml/2006/main" xmlns:r="http://schemas.openxmlformats.org/officeDocument/2006/relationships" xmlns:p="http://schemas.openxmlformats.org/presentationml/2006/main">
+  <p:cSld>
+    <p:spTree>
+      <p:nvGrpSpPr>
+        <p:cNvPr id="1" name=""/>
+        <p:cNvGrpSpPr/>
+        <p:nvPr/>
+      </p:nvGrpSpPr>
+      <p:grpSpPr>
+        <a:xfrm>
+          <a:off x="0" y="0"/>
+          <a:ext cx="0" cy="0"/>
+          <a:chOff x="0" y="0"/>
+          <a:chExt cx="0" cy="0"/>
+        </a:xfrm>
+      </p:grpSpPr>
+      <p:sp>
+        <p:nvSpPr>
+          <p:cNvPr id="2" name="Slide Image Placeholder 1"/>
+          <p:cNvSpPr>
+            <a:spLocks noGrp="1" noRot="1" noChangeAspect="1"/>
+          </p:cNvSpPr>
+          <p:nvPr>
+            <p:ph type="sldImg"/>
+          </p:nvPr>
+        </p:nvSpPr>
+        <p:spPr/>
+      </p:sp>
+      <p:sp>
+        <p:nvSpPr>
+          <p:cNvPr id="3" name="Notes Placeholder 2"/>
+          <p:cNvSpPr>
+            <a:spLocks noGrp="1"/>
+          </p:cNvSpPr>
+          <p:nvPr>
+            <p:ph type="body" idx="1"/>
+          </p:nvPr>
+        </p:nvSpPr>
+        <p:spPr/>
+        <p:txBody>
+          <a:bodyPr/>
+          <a:lstStyle/>
+          <a:p>
+            <a:r>
+              <a:rPr lang="en-US" dirty="0"/>
+              <a:t>Speaker Notes:
+• Combining expenses and transfers into unified Transaction type
+• Using discriminated unions for type safety
+• Display different types together in one list
+• TypeScript knows which fields available based on type field
+• Clean way to handle heterogeneous data</a:t>
+            </a:r>
+            <a:endParaRPr lang="en-US" dirty="0"/>
+          </a:p>
+        </p:txBody>
+      </p:sp>
+      <p:sp>
+        <p:nvSpPr>
+          <p:cNvPr id="4" name="Slide Number Placeholder 3"/>
+          <p:cNvSpPr>
+            <a:spLocks noGrp="1"/>
+          </p:cNvSpPr>
+          <p:nvPr>
+            <p:ph type="sldNum" sz="quarter" idx="10"/>
+          </p:nvPr>
+        </p:nvSpPr>
+        <p:spPr/>
+        <p:txBody>
+          <a:bodyPr/>
+          <a:lstStyle/>
+          <a:p>
+            <a:fld id="{F7021451-1387-4CA6-816F-3879F97B5CBC}" type="slidenum">
+              <a:rPr lang="en-US"/>
+              <a:t>13</a:t>
+            </a:fld>
+            <a:endParaRPr lang="en-US"/>
+          </a:p>
+        </p:txBody>
+      </p:sp>
+    </p:spTree>
+    <p:extLst>
+      <p:ext uri="{BB962C8B-B14F-4D97-AF65-F5344CB8AC3E}">
+        <p14:creationId xmlns:p14="http://schemas.microsoft.com/office/powerpoint/2010/main" val="1024086991"/>
+      </p:ext>
+    </p:extLst>
+  </p:cSld>
+  <p:clrMapOvr>
+    <a:masterClrMapping/>
+  </p:clrMapOvr>
+</p:notes>
+</file>
+
+<file path=ppt/notesSlides/notesSlide14.xml><?xml version="1.0" encoding="utf-8"?>
+<p:notes xmlns:a="http://schemas.openxmlformats.org/drawingml/2006/main" xmlns:r="http://schemas.openxmlformats.org/officeDocument/2006/relationships" xmlns:p="http://schemas.openxmlformats.org/presentationml/2006/main">
+  <p:cSld>
+    <p:spTree>
+      <p:nvGrpSpPr>
+        <p:cNvPr id="1" name=""/>
+        <p:cNvGrpSpPr/>
+        <p:nvPr/>
+      </p:nvGrpSpPr>
+      <p:grpSpPr>
+        <a:xfrm>
+          <a:off x="0" y="0"/>
+          <a:ext cx="0" cy="0"/>
+          <a:chOff x="0" y="0"/>
+          <a:chExt cx="0" cy="0"/>
+        </a:xfrm>
+      </p:grpSpPr>
+      <p:sp>
+        <p:nvSpPr>
+          <p:cNvPr id="2" name="Slide Image Placeholder 1"/>
+          <p:cNvSpPr>
+            <a:spLocks noGrp="1" noRot="1" noChangeAspect="1"/>
+          </p:cNvSpPr>
+          <p:nvPr>
+            <p:ph type="sldImg"/>
+          </p:nvPr>
+        </p:nvSpPr>
+        <p:spPr/>
+      </p:sp>
+      <p:sp>
+        <p:nvSpPr>
+          <p:cNvPr id="3" name="Notes Placeholder 2"/>
+          <p:cNvSpPr>
+            <a:spLocks noGrp="1"/>
+          </p:cNvSpPr>
+          <p:nvPr>
+            <p:ph type="body" idx="1"/>
+          </p:nvPr>
+        </p:nvSpPr>
+        <p:spPr/>
+        <p:txBody>
+          <a:bodyPr/>
+          <a:lstStyle/>
+          <a:p>
+            <a:r>
+              <a:rPr lang="en-US" dirty="0"/>
+              <a:t>Speaker Notes:
+• Centralize all API calls in dedicated module
+• Easy to add error handling, authentication in one place
+• Request/response transformation centralized
+• Components don't need to know about HTTP details
+• Better testing and mocking capabilities
+• Consistent API patterns across app</a:t>
+            </a:r>
+            <a:endParaRPr lang="en-US" dirty="0"/>
+          </a:p>
+        </p:txBody>
+      </p:sp>
+      <p:sp>
+        <p:nvSpPr>
+          <p:cNvPr id="4" name="Slide Number Placeholder 3"/>
+          <p:cNvSpPr>
+            <a:spLocks noGrp="1"/>
+          </p:cNvSpPr>
+          <p:nvPr>
+            <p:ph type="sldNum" sz="quarter" idx="10"/>
+          </p:nvPr>
+        </p:nvSpPr>
+        <p:spPr/>
+        <p:txBody>
+          <a:bodyPr/>
+          <a:lstStyle/>
+          <a:p>
+            <a:fld id="{F7021451-1387-4CA6-816F-3879F97B5CBC}" type="slidenum">
+              <a:rPr lang="en-US"/>
+              <a:t>14</a:t>
+            </a:fld>
+            <a:endParaRPr lang="en-US"/>
+          </a:p>
+        </p:txBody>
+      </p:sp>
+    </p:spTree>
+    <p:extLst>
+      <p:ext uri="{BB962C8B-B14F-4D97-AF65-F5344CB8AC3E}">
+        <p14:creationId xmlns:p14="http://schemas.microsoft.com/office/powerpoint/2010/main" val="1024086991"/>
+      </p:ext>
+    </p:extLst>
+  </p:cSld>
+  <p:clrMapOvr>
+    <a:masterClrMapping/>
+  </p:clrMapOvr>
+</p:notes>
+</file>
+
+<file path=ppt/notesSlides/notesSlide15.xml><?xml version="1.0" encoding="utf-8"?>
+<p:notes xmlns:a="http://schemas.openxmlformats.org/drawingml/2006/main" xmlns:r="http://schemas.openxmlformats.org/officeDocument/2006/relationships" xmlns:p="http://schemas.openxmlformats.org/presentationml/2006/main">
+  <p:cSld>
+    <p:spTree>
+      <p:nvGrpSpPr>
+        <p:cNvPr id="1" name=""/>
+        <p:cNvGrpSpPr/>
+        <p:nvPr/>
+      </p:nvGrpSpPr>
+      <p:grpSpPr>
+        <a:xfrm>
+          <a:off x="0" y="0"/>
+          <a:ext cx="0" cy="0"/>
+          <a:chOff x="0" y="0"/>
+          <a:chExt cx="0" cy="0"/>
+        </a:xfrm>
+      </p:grpSpPr>
+      <p:sp>
+        <p:nvSpPr>
+          <p:cNvPr id="2" name="Slide Image Placeholder 1"/>
+          <p:cNvSpPr>
+            <a:spLocks noGrp="1" noRot="1" noChangeAspect="1"/>
+          </p:cNvSpPr>
+          <p:nvPr>
+            <p:ph type="sldImg"/>
+          </p:nvPr>
+        </p:nvSpPr>
+        <p:spPr/>
+      </p:sp>
+      <p:sp>
+        <p:nvSpPr>
+          <p:cNvPr id="3" name="Notes Placeholder 2"/>
+          <p:cNvSpPr>
+            <a:spLocks noGrp="1"/>
+          </p:cNvSpPr>
+          <p:nvPr>
+            <p:ph type="body" idx="1"/>
+          </p:nvPr>
+        </p:nvSpPr>
+        <p:spPr/>
+        <p:txBody>
+          <a:bodyPr/>
+          <a:lstStyle/>
+          <a:p>
+            <a:r>
+              <a:rPr lang="en-US" dirty="0"/>
+              <a:t>Speaker Notes:
+• Organize code by feature, not by file type
+• Each page gets own folder with loader, component, action files
+• Index.ts files provide clean imports
+• Scales much better than all components in one folder
+• Easy to find related files
+• Supports feature-based development teams</a:t>
+            </a:r>
+            <a:endParaRPr lang="en-US" dirty="0"/>
+          </a:p>
+        </p:txBody>
+      </p:sp>
+      <p:sp>
+        <p:nvSpPr>
+          <p:cNvPr id="4" name="Slide Number Placeholder 3"/>
+          <p:cNvSpPr>
+            <a:spLocks noGrp="1"/>
+          </p:cNvSpPr>
+          <p:nvPr>
+            <p:ph type="sldNum" sz="quarter" idx="10"/>
+          </p:nvPr>
+        </p:nvSpPr>
+        <p:spPr/>
+        <p:txBody>
+          <a:bodyPr/>
+          <a:lstStyle/>
+          <a:p>
+            <a:fld id="{F7021451-1387-4CA6-816F-3879F97B5CBC}" type="slidenum">
+              <a:rPr lang="en-US"/>
+              <a:t>15</a:t>
+            </a:fld>
+            <a:endParaRPr lang="en-US"/>
+          </a:p>
+        </p:txBody>
+      </p:sp>
+    </p:spTree>
+    <p:extLst>
+      <p:ext uri="{BB962C8B-B14F-4D97-AF65-F5344CB8AC3E}">
+        <p14:creationId xmlns:p14="http://schemas.microsoft.com/office/powerpoint/2010/main" val="1024086991"/>
+      </p:ext>
+    </p:extLst>
+  </p:cSld>
+  <p:clrMapOvr>
+    <a:masterClrMapping/>
+  </p:clrMapOvr>
+</p:notes>
+</file>
+
+<file path=ppt/notesSlides/notesSlide16.xml><?xml version="1.0" encoding="utf-8"?>
+<p:notes xmlns:a="http://schemas.openxmlformats.org/drawingml/2006/main" xmlns:r="http://schemas.openxmlformats.org/officeDocument/2006/relationships" xmlns:p="http://schemas.openxmlformats.org/presentationml/2006/main">
+  <p:cSld>
+    <p:spTree>
+      <p:nvGrpSpPr>
+        <p:cNvPr id="1" name=""/>
+        <p:cNvGrpSpPr/>
+        <p:nvPr/>
+      </p:nvGrpSpPr>
+      <p:grpSpPr>
+        <a:xfrm>
+          <a:off x="0" y="0"/>
+          <a:ext cx="0" cy="0"/>
+          <a:chOff x="0" y="0"/>
+          <a:chExt cx="0" cy="0"/>
+        </a:xfrm>
+      </p:grpSpPr>
+      <p:sp>
+        <p:nvSpPr>
+          <p:cNvPr id="2" name="Slide Image Placeholder 1"/>
+          <p:cNvSpPr>
+            <a:spLocks noGrp="1" noRot="1" noChangeAspect="1"/>
+          </p:cNvSpPr>
+          <p:nvPr>
+            <p:ph type="sldImg"/>
+          </p:nvPr>
+        </p:nvSpPr>
+        <p:spPr/>
+      </p:sp>
+      <p:sp>
+        <p:nvSpPr>
+          <p:cNvPr id="3" name="Notes Placeholder 2"/>
+          <p:cNvSpPr>
+            <a:spLocks noGrp="1"/>
+          </p:cNvSpPr>
+          <p:nvPr>
+            <p:ph type="body" idx="1"/>
+          </p:nvPr>
+        </p:nvSpPr>
+        <p:spPr/>
+        <p:txBody>
+          <a:bodyPr/>
+          <a:lstStyle/>
+          <a:p>
+            <a:r>
+              <a:rPr lang="en-US" dirty="0"/>
+              <a:t>Speaker Notes:
+• These patterns might seem like extra work now
+• Pay dividends as application grows
+• Make code more predictable, testable, maintainable
+• Building habits for professional development
+• Foundation for scaling to larger teams
+• Industry best practices</a:t>
+            </a:r>
+            <a:endParaRPr lang="en-US" dirty="0"/>
+          </a:p>
+        </p:txBody>
+      </p:sp>
+      <p:sp>
+        <p:nvSpPr>
+          <p:cNvPr id="4" name="Slide Number Placeholder 3"/>
+          <p:cNvSpPr>
+            <a:spLocks noGrp="1"/>
+          </p:cNvSpPr>
+          <p:nvPr>
+            <p:ph type="sldNum" sz="quarter" idx="10"/>
+          </p:nvPr>
+        </p:nvSpPr>
+        <p:spPr/>
+        <p:txBody>
+          <a:bodyPr/>
+          <a:lstStyle/>
+          <a:p>
+            <a:fld id="{F7021451-1387-4CA6-816F-3879F97B5CBC}" type="slidenum">
+              <a:rPr lang="en-US"/>
+              <a:t>16</a:t>
+            </a:fld>
+            <a:endParaRPr lang="en-US"/>
+          </a:p>
+        </p:txBody>
+      </p:sp>
+    </p:spTree>
+    <p:extLst>
+      <p:ext uri="{BB962C8B-B14F-4D97-AF65-F5344CB8AC3E}">
+        <p14:creationId xmlns:p14="http://schemas.microsoft.com/office/powerpoint/2010/main" val="1024086991"/>
+      </p:ext>
+    </p:extLst>
+  </p:cSld>
+  <p:clrMapOvr>
+    <a:masterClrMapping/>
+  </p:clrMapOvr>
+</p:notes>
+</file>
+
+<file path=ppt/notesSlides/notesSlide17.xml><?xml version="1.0" encoding="utf-8"?>
+<p:notes xmlns:a="http://schemas.openxmlformats.org/drawingml/2006/main" xmlns:r="http://schemas.openxmlformats.org/officeDocument/2006/relationships" xmlns:p="http://schemas.openxmlformats.org/presentationml/2006/main">
+  <p:cSld>
+    <p:spTree>
+      <p:nvGrpSpPr>
+        <p:cNvPr id="1" name=""/>
+        <p:cNvGrpSpPr/>
+        <p:nvPr/>
+      </p:nvGrpSpPr>
+      <p:grpSpPr>
+        <a:xfrm>
+          <a:off x="0" y="0"/>
+          <a:ext cx="0" cy="0"/>
+          <a:chOff x="0" y="0"/>
+          <a:chExt cx="0" cy="0"/>
+        </a:xfrm>
+      </p:grpSpPr>
+      <p:sp>
+        <p:nvSpPr>
+          <p:cNvPr id="2" name="Slide Image Placeholder 1"/>
+          <p:cNvSpPr>
+            <a:spLocks noGrp="1" noRot="1" noChangeAspect="1"/>
+          </p:cNvSpPr>
+          <p:nvPr>
+            <p:ph type="sldImg"/>
+          </p:nvPr>
+        </p:nvSpPr>
+        <p:spPr/>
+      </p:sp>
+      <p:sp>
+        <p:nvSpPr>
+          <p:cNvPr id="3" name="Notes Placeholder 2"/>
+          <p:cNvSpPr>
+            <a:spLocks noGrp="1"/>
+          </p:cNvSpPr>
+          <p:nvPr>
+            <p:ph type="body" idx="1"/>
+          </p:nvPr>
+        </p:nvSpPr>
+        <p:spPr/>
+        <p:txBody>
+          <a:bodyPr/>
+          <a:lstStyle/>
+          <a:p>
+            <a:r>
+              <a:rPr lang="en-US" dirty="0"/>
+              <a:t>Speaker Notes:
+• Any questions before diving into exercises?
+• Transforming from simple prototype to production-ready architecture
+• Big step but each piece builds on concepts you already know
+• Focus on understanding the patterns, not memorizing syntax
+• Apply these concepts in the hands-on exercises</a:t>
+            </a:r>
+            <a:endParaRPr lang="en-US" dirty="0"/>
+          </a:p>
+        </p:txBody>
+      </p:sp>
+      <p:sp>
+        <p:nvSpPr>
+          <p:cNvPr id="4" name="Slide Number Placeholder 3"/>
+          <p:cNvSpPr>
+            <a:spLocks noGrp="1"/>
+          </p:cNvSpPr>
+          <p:nvPr>
+            <p:ph type="sldNum" sz="quarter" idx="10"/>
+          </p:nvPr>
+        </p:nvSpPr>
+        <p:spPr/>
+        <p:txBody>
+          <a:bodyPr/>
+          <a:lstStyle/>
+          <a:p>
+            <a:fld id="{F7021451-1387-4CA6-816F-3879F97B5CBC}" type="slidenum">
+              <a:rPr lang="en-US"/>
+              <a:t>17</a:t>
+            </a:fld>
+            <a:endParaRPr lang="en-US"/>
+          </a:p>
+        </p:txBody>
+      </p:sp>
+    </p:spTree>
+    <p:extLst>
+      <p:ext uri="{BB962C8B-B14F-4D97-AF65-F5344CB8AC3E}">
+        <p14:creationId xmlns:p14="http://schemas.microsoft.com/office/powerpoint/2010/main" val="1024086991"/>
+      </p:ext>
+    </p:extLst>
+  </p:cSld>
+  <p:clrMapOvr>
+    <a:masterClrMapping/>
+  </p:clrMapOvr>
+</p:notes>
+</file>
+
 <file path=ppt/notesSlides/notesSlide2.xml><?xml version="1.0" encoding="utf-8"?>
 <p:notes xmlns:a="http://schemas.openxmlformats.org/drawingml/2006/main" xmlns:r="http://schemas.openxmlformats.org/officeDocument/2006/relationships" xmlns:p="http://schemas.openxmlformats.org/presentationml/2006/main">
   <p:cSld>
@@ -595,7 +1358,11 @@
           <a:p>
             <a:r>
               <a:rPr lang="en-US" dirty="0"/>
-              <a:t/>
+              <a:t>Speaker Notes:
+• Users can create accounts and share expenses with friends
+• Transfer money to settle debts between users
+• Moving from simple CRUD to real-world application
+• Learning patterns used in professional development</a:t>
             </a:r>
             <a:endParaRPr lang="en-US" dirty="0"/>
           </a:p>
@@ -683,7 +1450,11 @@
           <a:p>
             <a:r>
               <a:rPr lang="en-US" dirty="0"/>
-              <a:t/>
+              <a:t>Speaker Notes:
+• Replacing Express generator with modern TypeScript setup
+• Better organization, type safety, built-in security
+• Testing infrastructure included
+• Each feature gets own folder - clear separation of concerns</a:t>
             </a:r>
             <a:endParaRPr lang="en-US" dirty="0"/>
           </a:p>
@@ -771,7 +1542,12 @@
           <a:p>
             <a:r>
               <a:rPr lang="en-US" dirty="0"/>
-              <a:t/>
+              <a:t>Speaker Notes:
+• Consistent pattern: Router → Controller → Repository
+• Controllers handle HTTP concerns, repositories handle data access
+• Makes code predictable and testable
+• TypeScript catches errors at compile time
+• Notice proper status codes and type conversions</a:t>
             </a:r>
             <a:endParaRPr lang="en-US" dirty="0"/>
           </a:p>
@@ -859,7 +1635,12 @@
           <a:p>
             <a:r>
               <a:rPr lang="en-US" dirty="0"/>
-              <a:t/>
+              <a:t>Speaker Notes:
+• Introducing proper relational data modeling
+• One user has many relationships: pays, participates, sends, receives
+• Relation names required when multiple relations between same models
+• Much better than storing comma-separated strings
+• Database enforces referential integrity</a:t>
             </a:r>
             <a:endParaRPr lang="en-US" dirty="0"/>
           </a:p>
@@ -947,7 +1728,12 @@
           <a:p>
             <a:r>
               <a:rPr lang="en-US" dirty="0"/>
-              <a:t/>
+              <a:t>Speaker Notes:
+• One expense has one payer but multiple participants
+• Prisma creates implicit join table for many-to-many relation
+• Much cleaner than storing comma-separated participant names
+• Database handles the complexity of relationships
+• Can query participants easily with include</a:t>
             </a:r>
             <a:endParaRPr lang="en-US" dirty="0"/>
           </a:p>
@@ -971,6 +1757,287 @@
             <a:fld id="{F7021451-1387-4CA6-816F-3879F97B5CBC}" type="slidenum">
               <a:rPr lang="en-US"/>
               <a:t>6</a:t>
+            </a:fld>
+            <a:endParaRPr lang="en-US"/>
+          </a:p>
+        </p:txBody>
+      </p:sp>
+    </p:spTree>
+    <p:extLst>
+      <p:ext uri="{BB962C8B-B14F-4D97-AF65-F5344CB8AC3E}">
+        <p14:creationId xmlns:p14="http://schemas.microsoft.com/office/powerpoint/2010/main" val="1024086991"/>
+      </p:ext>
+    </p:extLst>
+  </p:cSld>
+  <p:clrMapOvr>
+    <a:masterClrMapping/>
+  </p:clrMapOvr>
+</p:notes>
+</file>
+
+<file path=ppt/notesSlides/notesSlide7.xml><?xml version="1.0" encoding="utf-8"?>
+<p:notes xmlns:a="http://schemas.openxmlformats.org/drawingml/2006/main" xmlns:r="http://schemas.openxmlformats.org/officeDocument/2006/relationships" xmlns:p="http://schemas.openxmlformats.org/presentationml/2006/main">
+  <p:cSld>
+    <p:spTree>
+      <p:nvGrpSpPr>
+        <p:cNvPr id="1" name=""/>
+        <p:cNvGrpSpPr/>
+        <p:nvPr/>
+      </p:nvGrpSpPr>
+      <p:grpSpPr>
+        <a:xfrm>
+          <a:off x="0" y="0"/>
+          <a:ext cx="0" cy="0"/>
+          <a:chOff x="0" y="0"/>
+          <a:chExt cx="0" cy="0"/>
+        </a:xfrm>
+      </p:grpSpPr>
+      <p:sp>
+        <p:nvSpPr>
+          <p:cNvPr id="2" name="Slide Image Placeholder 1"/>
+          <p:cNvSpPr>
+            <a:spLocks noGrp="1" noRot="1" noChangeAspect="1"/>
+          </p:cNvSpPr>
+          <p:nvPr>
+            <p:ph type="sldImg"/>
+          </p:nvPr>
+        </p:nvSpPr>
+        <p:spPr/>
+      </p:sp>
+      <p:sp>
+        <p:nvSpPr>
+          <p:cNvPr id="3" name="Notes Placeholder 2"/>
+          <p:cNvSpPr>
+            <a:spLocks noGrp="1"/>
+          </p:cNvSpPr>
+          <p:nvPr>
+            <p:ph type="body" idx="1"/>
+          </p:nvPr>
+        </p:nvSpPr>
+        <p:spPr/>
+        <p:txBody>
+          <a:bodyPr/>
+          <a:lstStyle/>
+          <a:p>
+            <a:r>
+              <a:rPr lang="en-US" dirty="0"/>
+              <a:t>Speaker Notes:
+• Moving from db push to proper migrations
+• Migrations give version control for database schema
+• Can preserve data during schema changes
+• Ensures consistent deployments across environments
+• Dev creates and applies migrations, deploy only applies existing ones
+• Critical for production applications</a:t>
+            </a:r>
+            <a:endParaRPr lang="en-US" dirty="0"/>
+          </a:p>
+        </p:txBody>
+      </p:sp>
+      <p:sp>
+        <p:nvSpPr>
+          <p:cNvPr id="4" name="Slide Number Placeholder 3"/>
+          <p:cNvSpPr>
+            <a:spLocks noGrp="1"/>
+          </p:cNvSpPr>
+          <p:nvPr>
+            <p:ph type="sldNum" sz="quarter" idx="10"/>
+          </p:nvPr>
+        </p:nvSpPr>
+        <p:spPr/>
+        <p:txBody>
+          <a:bodyPr/>
+          <a:lstStyle/>
+          <a:p>
+            <a:fld id="{F7021451-1387-4CA6-816F-3879F97B5CBC}" type="slidenum">
+              <a:rPr lang="en-US"/>
+              <a:t>7</a:t>
+            </a:fld>
+            <a:endParaRPr lang="en-US"/>
+          </a:p>
+        </p:txBody>
+      </p:sp>
+    </p:spTree>
+    <p:extLst>
+      <p:ext uri="{BB962C8B-B14F-4D97-AF65-F5344CB8AC3E}">
+        <p14:creationId xmlns:p14="http://schemas.microsoft.com/office/powerpoint/2010/main" val="1024086991"/>
+      </p:ext>
+    </p:extLst>
+  </p:cSld>
+  <p:clrMapOvr>
+    <a:masterClrMapping/>
+  </p:clrMapOvr>
+</p:notes>
+</file>
+
+<file path=ppt/notesSlides/notesSlide8.xml><?xml version="1.0" encoding="utf-8"?>
+<p:notes xmlns:a="http://schemas.openxmlformats.org/drawingml/2006/main" xmlns:r="http://schemas.openxmlformats.org/officeDocument/2006/relationships" xmlns:p="http://schemas.openxmlformats.org/presentationml/2006/main">
+  <p:cSld>
+    <p:spTree>
+      <p:nvGrpSpPr>
+        <p:cNvPr id="1" name=""/>
+        <p:cNvGrpSpPr/>
+        <p:nvPr/>
+      </p:nvGrpSpPr>
+      <p:grpSpPr>
+        <a:xfrm>
+          <a:off x="0" y="0"/>
+          <a:ext cx="0" cy="0"/>
+          <a:chOff x="0" y="0"/>
+          <a:chExt cx="0" cy="0"/>
+        </a:xfrm>
+      </p:grpSpPr>
+      <p:sp>
+        <p:nvSpPr>
+          <p:cNvPr id="2" name="Slide Image Placeholder 1"/>
+          <p:cNvSpPr>
+            <a:spLocks noGrp="1" noRot="1" noChangeAspect="1"/>
+          </p:cNvSpPr>
+          <p:nvPr>
+            <p:ph type="sldImg"/>
+          </p:nvPr>
+        </p:nvSpPr>
+        <p:spPr/>
+      </p:sp>
+      <p:sp>
+        <p:nvSpPr>
+          <p:cNvPr id="3" name="Notes Placeholder 2"/>
+          <p:cNvSpPr>
+            <a:spLocks noGrp="1"/>
+          </p:cNvSpPr>
+          <p:nvPr>
+            <p:ph type="body" idx="1"/>
+          </p:nvPr>
+        </p:nvSpPr>
+        <p:spPr/>
+        <p:txBody>
+          <a:bodyPr/>
+          <a:lstStyle/>
+          <a:p>
+            <a:r>
+              <a:rPr lang="en-US" dirty="0"/>
+              <a:t>Speaker Notes:
+• Sometimes need custom migration logic to preserve data
+• Converting string payers to User references
+• Create users from existing data first
+• Add foreign key column as nullable, populate it, then make required
+• Prevents data loss during schema evolution
+• SQL gives us fine control over migration process</a:t>
+            </a:r>
+            <a:endParaRPr lang="en-US" dirty="0"/>
+          </a:p>
+        </p:txBody>
+      </p:sp>
+      <p:sp>
+        <p:nvSpPr>
+          <p:cNvPr id="4" name="Slide Number Placeholder 3"/>
+          <p:cNvSpPr>
+            <a:spLocks noGrp="1"/>
+          </p:cNvSpPr>
+          <p:nvPr>
+            <p:ph type="sldNum" sz="quarter" idx="10"/>
+          </p:nvPr>
+        </p:nvSpPr>
+        <p:spPr/>
+        <p:txBody>
+          <a:bodyPr/>
+          <a:lstStyle/>
+          <a:p>
+            <a:fld id="{F7021451-1387-4CA6-816F-3879F97B5CBC}" type="slidenum">
+              <a:rPr lang="en-US"/>
+              <a:t>8</a:t>
+            </a:fld>
+            <a:endParaRPr lang="en-US"/>
+          </a:p>
+        </p:txBody>
+      </p:sp>
+    </p:spTree>
+    <p:extLst>
+      <p:ext uri="{BB962C8B-B14F-4D97-AF65-F5344CB8AC3E}">
+        <p14:creationId xmlns:p14="http://schemas.microsoft.com/office/powerpoint/2010/main" val="1024086991"/>
+      </p:ext>
+    </p:extLst>
+  </p:cSld>
+  <p:clrMapOvr>
+    <a:masterClrMapping/>
+  </p:clrMapOvr>
+</p:notes>
+</file>
+
+<file path=ppt/notesSlides/notesSlide9.xml><?xml version="1.0" encoding="utf-8"?>
+<p:notes xmlns:a="http://schemas.openxmlformats.org/drawingml/2006/main" xmlns:r="http://schemas.openxmlformats.org/officeDocument/2006/relationships" xmlns:p="http://schemas.openxmlformats.org/presentationml/2006/main">
+  <p:cSld>
+    <p:spTree>
+      <p:nvGrpSpPr>
+        <p:cNvPr id="1" name=""/>
+        <p:cNvGrpSpPr/>
+        <p:nvPr/>
+      </p:nvGrpSpPr>
+      <p:grpSpPr>
+        <a:xfrm>
+          <a:off x="0" y="0"/>
+          <a:ext cx="0" cy="0"/>
+          <a:chOff x="0" y="0"/>
+          <a:chExt cx="0" cy="0"/>
+        </a:xfrm>
+      </p:grpSpPr>
+      <p:sp>
+        <p:nvSpPr>
+          <p:cNvPr id="2" name="Slide Image Placeholder 1"/>
+          <p:cNvSpPr>
+            <a:spLocks noGrp="1" noRot="1" noChangeAspect="1"/>
+          </p:cNvSpPr>
+          <p:nvPr>
+            <p:ph type="sldImg"/>
+          </p:nvPr>
+        </p:nvSpPr>
+        <p:spPr/>
+      </p:sp>
+      <p:sp>
+        <p:nvSpPr>
+          <p:cNvPr id="3" name="Notes Placeholder 2"/>
+          <p:cNvSpPr>
+            <a:spLocks noGrp="1"/>
+          </p:cNvSpPr>
+          <p:nvPr>
+            <p:ph type="body" idx="1"/>
+          </p:nvPr>
+        </p:nvSpPr>
+        <p:spPr/>
+        <p:txBody>
+          <a:bodyPr/>
+          <a:lstStyle/>
+          <a:p>
+            <a:r>
+              <a:rPr lang="en-US" dirty="0"/>
+              <a:t>Speaker Notes:
+• Traditional approach puts data fetching inside components
+• Creates loading states and error handling complexity
+• Makes components less focused on presentation
+• Data fetching mixed with UI logic
+• Harder to cache and prefetch data</a:t>
+            </a:r>
+            <a:endParaRPr lang="en-US" dirty="0"/>
+          </a:p>
+        </p:txBody>
+      </p:sp>
+      <p:sp>
+        <p:nvSpPr>
+          <p:cNvPr id="4" name="Slide Number Placeholder 3"/>
+          <p:cNvSpPr>
+            <a:spLocks noGrp="1"/>
+          </p:cNvSpPr>
+          <p:nvPr>
+            <p:ph type="sldNum" sz="quarter" idx="10"/>
+          </p:nvPr>
+        </p:nvSpPr>
+        <p:spPr/>
+        <p:txBody>
+          <a:bodyPr/>
+          <a:lstStyle/>
+          <a:p>
+            <a:fld id="{F7021451-1387-4CA6-816F-3879F97B5CBC}" type="slidenum">
+              <a:rPr lang="en-US"/>
+              <a:t>9</a:t>
             </a:fld>
             <a:endParaRPr lang="en-US"/>
           </a:p>
@@ -1335,6 +2402,318 @@
 </p:sld>
 </file>
 
+<file path=ppt/slides/slide10.xml><?xml version="1.0" encoding="utf-8"?>
+<p:sld xmlns:a="http://schemas.openxmlformats.org/drawingml/2006/main" xmlns:r="http://schemas.openxmlformats.org/officeDocument/2006/relationships" xmlns:p="http://schemas.openxmlformats.org/presentationml/2006/main">
+  <p:cSld name="Slide 10">
+    <p:bg>
+      <p:bgPr>
+        <a:blipFill dpi="0" rotWithShape="1">
+          <a:blip r:embed="rId1">
+            <a:lum/>
+          </a:blip>
+          <a:srcRect/>
+          <a:stretch>
+            <a:fillRect/>
+          </a:stretch>
+        </a:blipFill>
+        <a:effectLst/>
+      </p:bgPr>
+    </p:bg>
+    <p:spTree>
+      <p:nvGrpSpPr>
+        <p:cNvPr id="1" name=""/>
+        <p:cNvGrpSpPr/>
+        <p:nvPr/>
+      </p:nvGrpSpPr>
+      <p:grpSpPr>
+        <a:xfrm>
+          <a:off x="0" y="0"/>
+          <a:ext cx="0" cy="0"/>
+          <a:chOff x="0" y="0"/>
+          <a:chExt cx="0" cy="0"/>
+        </a:xfrm>
+      </p:grpSpPr>
+    </p:spTree>
+  </p:cSld>
+  <p:clrMapOvr>
+    <a:masterClrMapping/>
+  </p:clrMapOvr>
+</p:sld>
+</file>
+
+<file path=ppt/slides/slide11.xml><?xml version="1.0" encoding="utf-8"?>
+<p:sld xmlns:a="http://schemas.openxmlformats.org/drawingml/2006/main" xmlns:r="http://schemas.openxmlformats.org/officeDocument/2006/relationships" xmlns:p="http://schemas.openxmlformats.org/presentationml/2006/main">
+  <p:cSld name="Slide 11">
+    <p:bg>
+      <p:bgPr>
+        <a:blipFill dpi="0" rotWithShape="1">
+          <a:blip r:embed="rId1">
+            <a:lum/>
+          </a:blip>
+          <a:srcRect/>
+          <a:stretch>
+            <a:fillRect/>
+          </a:stretch>
+        </a:blipFill>
+        <a:effectLst/>
+      </p:bgPr>
+    </p:bg>
+    <p:spTree>
+      <p:nvGrpSpPr>
+        <p:cNvPr id="1" name=""/>
+        <p:cNvGrpSpPr/>
+        <p:nvPr/>
+      </p:nvGrpSpPr>
+      <p:grpSpPr>
+        <a:xfrm>
+          <a:off x="0" y="0"/>
+          <a:ext cx="0" cy="0"/>
+          <a:chOff x="0" y="0"/>
+          <a:chExt cx="0" cy="0"/>
+        </a:xfrm>
+      </p:grpSpPr>
+    </p:spTree>
+  </p:cSld>
+  <p:clrMapOvr>
+    <a:masterClrMapping/>
+  </p:clrMapOvr>
+</p:sld>
+</file>
+
+<file path=ppt/slides/slide12.xml><?xml version="1.0" encoding="utf-8"?>
+<p:sld xmlns:a="http://schemas.openxmlformats.org/drawingml/2006/main" xmlns:r="http://schemas.openxmlformats.org/officeDocument/2006/relationships" xmlns:p="http://schemas.openxmlformats.org/presentationml/2006/main">
+  <p:cSld name="Slide 12">
+    <p:bg>
+      <p:bgPr>
+        <a:blipFill dpi="0" rotWithShape="1">
+          <a:blip r:embed="rId1">
+            <a:lum/>
+          </a:blip>
+          <a:srcRect/>
+          <a:stretch>
+            <a:fillRect/>
+          </a:stretch>
+        </a:blipFill>
+        <a:effectLst/>
+      </p:bgPr>
+    </p:bg>
+    <p:spTree>
+      <p:nvGrpSpPr>
+        <p:cNvPr id="1" name=""/>
+        <p:cNvGrpSpPr/>
+        <p:nvPr/>
+      </p:nvGrpSpPr>
+      <p:grpSpPr>
+        <a:xfrm>
+          <a:off x="0" y="0"/>
+          <a:ext cx="0" cy="0"/>
+          <a:chOff x="0" y="0"/>
+          <a:chExt cx="0" cy="0"/>
+        </a:xfrm>
+      </p:grpSpPr>
+    </p:spTree>
+  </p:cSld>
+  <p:clrMapOvr>
+    <a:masterClrMapping/>
+  </p:clrMapOvr>
+</p:sld>
+</file>
+
+<file path=ppt/slides/slide13.xml><?xml version="1.0" encoding="utf-8"?>
+<p:sld xmlns:a="http://schemas.openxmlformats.org/drawingml/2006/main" xmlns:r="http://schemas.openxmlformats.org/officeDocument/2006/relationships" xmlns:p="http://schemas.openxmlformats.org/presentationml/2006/main">
+  <p:cSld name="Slide 13">
+    <p:bg>
+      <p:bgPr>
+        <a:blipFill dpi="0" rotWithShape="1">
+          <a:blip r:embed="rId1">
+            <a:lum/>
+          </a:blip>
+          <a:srcRect/>
+          <a:stretch>
+            <a:fillRect/>
+          </a:stretch>
+        </a:blipFill>
+        <a:effectLst/>
+      </p:bgPr>
+    </p:bg>
+    <p:spTree>
+      <p:nvGrpSpPr>
+        <p:cNvPr id="1" name=""/>
+        <p:cNvGrpSpPr/>
+        <p:nvPr/>
+      </p:nvGrpSpPr>
+      <p:grpSpPr>
+        <a:xfrm>
+          <a:off x="0" y="0"/>
+          <a:ext cx="0" cy="0"/>
+          <a:chOff x="0" y="0"/>
+          <a:chExt cx="0" cy="0"/>
+        </a:xfrm>
+      </p:grpSpPr>
+    </p:spTree>
+  </p:cSld>
+  <p:clrMapOvr>
+    <a:masterClrMapping/>
+  </p:clrMapOvr>
+</p:sld>
+</file>
+
+<file path=ppt/slides/slide14.xml><?xml version="1.0" encoding="utf-8"?>
+<p:sld xmlns:a="http://schemas.openxmlformats.org/drawingml/2006/main" xmlns:r="http://schemas.openxmlformats.org/officeDocument/2006/relationships" xmlns:p="http://schemas.openxmlformats.org/presentationml/2006/main">
+  <p:cSld name="Slide 14">
+    <p:bg>
+      <p:bgPr>
+        <a:blipFill dpi="0" rotWithShape="1">
+          <a:blip r:embed="rId1">
+            <a:lum/>
+          </a:blip>
+          <a:srcRect/>
+          <a:stretch>
+            <a:fillRect/>
+          </a:stretch>
+        </a:blipFill>
+        <a:effectLst/>
+      </p:bgPr>
+    </p:bg>
+    <p:spTree>
+      <p:nvGrpSpPr>
+        <p:cNvPr id="1" name=""/>
+        <p:cNvGrpSpPr/>
+        <p:nvPr/>
+      </p:nvGrpSpPr>
+      <p:grpSpPr>
+        <a:xfrm>
+          <a:off x="0" y="0"/>
+          <a:ext cx="0" cy="0"/>
+          <a:chOff x="0" y="0"/>
+          <a:chExt cx="0" cy="0"/>
+        </a:xfrm>
+      </p:grpSpPr>
+    </p:spTree>
+  </p:cSld>
+  <p:clrMapOvr>
+    <a:masterClrMapping/>
+  </p:clrMapOvr>
+</p:sld>
+</file>
+
+<file path=ppt/slides/slide15.xml><?xml version="1.0" encoding="utf-8"?>
+<p:sld xmlns:a="http://schemas.openxmlformats.org/drawingml/2006/main" xmlns:r="http://schemas.openxmlformats.org/officeDocument/2006/relationships" xmlns:p="http://schemas.openxmlformats.org/presentationml/2006/main">
+  <p:cSld name="Slide 15">
+    <p:bg>
+      <p:bgPr>
+        <a:blipFill dpi="0" rotWithShape="1">
+          <a:blip r:embed="rId1">
+            <a:lum/>
+          </a:blip>
+          <a:srcRect/>
+          <a:stretch>
+            <a:fillRect/>
+          </a:stretch>
+        </a:blipFill>
+        <a:effectLst/>
+      </p:bgPr>
+    </p:bg>
+    <p:spTree>
+      <p:nvGrpSpPr>
+        <p:cNvPr id="1" name=""/>
+        <p:cNvGrpSpPr/>
+        <p:nvPr/>
+      </p:nvGrpSpPr>
+      <p:grpSpPr>
+        <a:xfrm>
+          <a:off x="0" y="0"/>
+          <a:ext cx="0" cy="0"/>
+          <a:chOff x="0" y="0"/>
+          <a:chExt cx="0" cy="0"/>
+        </a:xfrm>
+      </p:grpSpPr>
+    </p:spTree>
+  </p:cSld>
+  <p:clrMapOvr>
+    <a:masterClrMapping/>
+  </p:clrMapOvr>
+</p:sld>
+</file>
+
+<file path=ppt/slides/slide16.xml><?xml version="1.0" encoding="utf-8"?>
+<p:sld xmlns:a="http://schemas.openxmlformats.org/drawingml/2006/main" xmlns:r="http://schemas.openxmlformats.org/officeDocument/2006/relationships" xmlns:p="http://schemas.openxmlformats.org/presentationml/2006/main">
+  <p:cSld name="Slide 16">
+    <p:bg>
+      <p:bgPr>
+        <a:blipFill dpi="0" rotWithShape="1">
+          <a:blip r:embed="rId1">
+            <a:lum/>
+          </a:blip>
+          <a:srcRect/>
+          <a:stretch>
+            <a:fillRect/>
+          </a:stretch>
+        </a:blipFill>
+        <a:effectLst/>
+      </p:bgPr>
+    </p:bg>
+    <p:spTree>
+      <p:nvGrpSpPr>
+        <p:cNvPr id="1" name=""/>
+        <p:cNvGrpSpPr/>
+        <p:nvPr/>
+      </p:nvGrpSpPr>
+      <p:grpSpPr>
+        <a:xfrm>
+          <a:off x="0" y="0"/>
+          <a:ext cx="0" cy="0"/>
+          <a:chOff x="0" y="0"/>
+          <a:chExt cx="0" cy="0"/>
+        </a:xfrm>
+      </p:grpSpPr>
+    </p:spTree>
+  </p:cSld>
+  <p:clrMapOvr>
+    <a:masterClrMapping/>
+  </p:clrMapOvr>
+</p:sld>
+</file>
+
+<file path=ppt/slides/slide17.xml><?xml version="1.0" encoding="utf-8"?>
+<p:sld xmlns:a="http://schemas.openxmlformats.org/drawingml/2006/main" xmlns:r="http://schemas.openxmlformats.org/officeDocument/2006/relationships" xmlns:p="http://schemas.openxmlformats.org/presentationml/2006/main">
+  <p:cSld name="Slide 17">
+    <p:bg>
+      <p:bgPr>
+        <a:blipFill dpi="0" rotWithShape="1">
+          <a:blip r:embed="rId1">
+            <a:lum/>
+          </a:blip>
+          <a:srcRect/>
+          <a:stretch>
+            <a:fillRect/>
+          </a:stretch>
+        </a:blipFill>
+        <a:effectLst/>
+      </p:bgPr>
+    </p:bg>
+    <p:spTree>
+      <p:nvGrpSpPr>
+        <p:cNvPr id="1" name=""/>
+        <p:cNvGrpSpPr/>
+        <p:nvPr/>
+      </p:nvGrpSpPr>
+      <p:grpSpPr>
+        <a:xfrm>
+          <a:off x="0" y="0"/>
+          <a:ext cx="0" cy="0"/>
+          <a:chOff x="0" y="0"/>
+          <a:chExt cx="0" cy="0"/>
+        </a:xfrm>
+      </p:grpSpPr>
+    </p:spTree>
+  </p:cSld>
+  <p:clrMapOvr>
+    <a:masterClrMapping/>
+  </p:clrMapOvr>
+</p:sld>
+</file>
+
 <file path=ppt/slides/slide2.xml><?xml version="1.0" encoding="utf-8"?>
 <p:sld xmlns:a="http://schemas.openxmlformats.org/drawingml/2006/main" xmlns:r="http://schemas.openxmlformats.org/officeDocument/2006/relationships" xmlns:p="http://schemas.openxmlformats.org/presentationml/2006/main">
   <p:cSld name="Slide 2">
@@ -1494,6 +2873,123 @@
 <file path=ppt/slides/slide6.xml><?xml version="1.0" encoding="utf-8"?>
 <p:sld xmlns:a="http://schemas.openxmlformats.org/drawingml/2006/main" xmlns:r="http://schemas.openxmlformats.org/officeDocument/2006/relationships" xmlns:p="http://schemas.openxmlformats.org/presentationml/2006/main">
   <p:cSld name="Slide 6">
+    <p:bg>
+      <p:bgPr>
+        <a:blipFill dpi="0" rotWithShape="1">
+          <a:blip r:embed="rId1">
+            <a:lum/>
+          </a:blip>
+          <a:srcRect/>
+          <a:stretch>
+            <a:fillRect/>
+          </a:stretch>
+        </a:blipFill>
+        <a:effectLst/>
+      </p:bgPr>
+    </p:bg>
+    <p:spTree>
+      <p:nvGrpSpPr>
+        <p:cNvPr id="1" name=""/>
+        <p:cNvGrpSpPr/>
+        <p:nvPr/>
+      </p:nvGrpSpPr>
+      <p:grpSpPr>
+        <a:xfrm>
+          <a:off x="0" y="0"/>
+          <a:ext cx="0" cy="0"/>
+          <a:chOff x="0" y="0"/>
+          <a:chExt cx="0" cy="0"/>
+        </a:xfrm>
+      </p:grpSpPr>
+    </p:spTree>
+  </p:cSld>
+  <p:clrMapOvr>
+    <a:masterClrMapping/>
+  </p:clrMapOvr>
+</p:sld>
+</file>
+
+<file path=ppt/slides/slide7.xml><?xml version="1.0" encoding="utf-8"?>
+<p:sld xmlns:a="http://schemas.openxmlformats.org/drawingml/2006/main" xmlns:r="http://schemas.openxmlformats.org/officeDocument/2006/relationships" xmlns:p="http://schemas.openxmlformats.org/presentationml/2006/main">
+  <p:cSld name="Slide 7">
+    <p:bg>
+      <p:bgPr>
+        <a:blipFill dpi="0" rotWithShape="1">
+          <a:blip r:embed="rId1">
+            <a:lum/>
+          </a:blip>
+          <a:srcRect/>
+          <a:stretch>
+            <a:fillRect/>
+          </a:stretch>
+        </a:blipFill>
+        <a:effectLst/>
+      </p:bgPr>
+    </p:bg>
+    <p:spTree>
+      <p:nvGrpSpPr>
+        <p:cNvPr id="1" name=""/>
+        <p:cNvGrpSpPr/>
+        <p:nvPr/>
+      </p:nvGrpSpPr>
+      <p:grpSpPr>
+        <a:xfrm>
+          <a:off x="0" y="0"/>
+          <a:ext cx="0" cy="0"/>
+          <a:chOff x="0" y="0"/>
+          <a:chExt cx="0" cy="0"/>
+        </a:xfrm>
+      </p:grpSpPr>
+    </p:spTree>
+  </p:cSld>
+  <p:clrMapOvr>
+    <a:masterClrMapping/>
+  </p:clrMapOvr>
+</p:sld>
+</file>
+
+<file path=ppt/slides/slide8.xml><?xml version="1.0" encoding="utf-8"?>
+<p:sld xmlns:a="http://schemas.openxmlformats.org/drawingml/2006/main" xmlns:r="http://schemas.openxmlformats.org/officeDocument/2006/relationships" xmlns:p="http://schemas.openxmlformats.org/presentationml/2006/main">
+  <p:cSld name="Slide 8">
+    <p:bg>
+      <p:bgPr>
+        <a:blipFill dpi="0" rotWithShape="1">
+          <a:blip r:embed="rId1">
+            <a:lum/>
+          </a:blip>
+          <a:srcRect/>
+          <a:stretch>
+            <a:fillRect/>
+          </a:stretch>
+        </a:blipFill>
+        <a:effectLst/>
+      </p:bgPr>
+    </p:bg>
+    <p:spTree>
+      <p:nvGrpSpPr>
+        <p:cNvPr id="1" name=""/>
+        <p:cNvGrpSpPr/>
+        <p:nvPr/>
+      </p:nvGrpSpPr>
+      <p:grpSpPr>
+        <a:xfrm>
+          <a:off x="0" y="0"/>
+          <a:ext cx="0" cy="0"/>
+          <a:chOff x="0" y="0"/>
+          <a:chExt cx="0" cy="0"/>
+        </a:xfrm>
+      </p:grpSpPr>
+    </p:spTree>
+  </p:cSld>
+  <p:clrMapOvr>
+    <a:masterClrMapping/>
+  </p:clrMapOvr>
+</p:sld>
+</file>
+
+<file path=ppt/slides/slide9.xml><?xml version="1.0" encoding="utf-8"?>
+<p:sld xmlns:a="http://schemas.openxmlformats.org/drawingml/2006/main" xmlns:r="http://schemas.openxmlformats.org/officeDocument/2006/relationships" xmlns:p="http://schemas.openxmlformats.org/presentationml/2006/main">
+  <p:cSld name="Slide 9">
     <p:bg>
       <p:bgPr>
         <a:blipFill dpi="0" rotWithShape="1">
